--- a/classes/parte-14-grc-riesgo-y-cumplimiento/279-nist-cybersecurity-framework/clase-279-presentacion.pptx
+++ b/classes/parte-14-grc-riesgo-y-cumplimiento/279-nist-cybersecurity-framework/clase-279-presentacion.pptx
@@ -17,6 +17,10 @@
     <p:sldId id="265" r:id="rId16"/>
     <p:sldId id="266" r:id="rId17"/>
     <p:sldId id="267" r:id="rId18"/>
+    <p:sldId id="268" r:id="rId19"/>
+    <p:sldId id="269" r:id="rId20"/>
+    <p:sldId id="270" r:id="rId21"/>
+    <p:sldId id="271" r:id="rId22"/>
   </p:sldIdLst>
   <p:sldSz cx="9144000" cy="6858000" type="screen4x3"/>
   <p:notesSz cx="6858000" cy="9144000"/>
@@ -3198,7 +3202,7 @@
                   <a:srgbClr val="0B3D2E"/>
                 </a:solidFill>
               </a:rPr>
-              <a:t>⚠️ Errores comunes</a:t>
+              <a:t>🧪 Laboratorio guiado (ejercicio aplicado)</a:t>
             </a:r>
           </a:p>
         </p:txBody>
@@ -3236,67 +3240,97 @@
                   <a:srgbClr val="22282E"/>
                 </a:solidFill>
               </a:rPr>
-              <a:t>•  Tratar el Tier como una "nota" a maximizar — El Tier objetivo depende del apetito de riesgo, no siempre es 4</a:t>
-            </a:r>
-          </a:p>
-          <a:p>
-            <a:pPr>
-              <a:spcAft>
-                <a:spcPts val="600"/>
-              </a:spcAft>
-            </a:pPr>
-            <a:r>
-              <a:rPr sz="1500">
-                <a:solidFill>
-                  <a:srgbClr val="22282E"/>
-                </a:solidFill>
-              </a:rPr>
-              <a:t>•  Perfil actual inflado — Sesgo de deseabilidad; puntúa con evidencia real</a:t>
-            </a:r>
-          </a:p>
-          <a:p>
-            <a:pPr>
-              <a:spcAft>
-                <a:spcPts val="600"/>
-              </a:spcAft>
-            </a:pPr>
-            <a:r>
-              <a:rPr sz="1500">
-                <a:solidFill>
-                  <a:srgbClr val="22282E"/>
-                </a:solidFill>
-              </a:rPr>
-              <a:t>•  Ignorar la función GOVERN — Es el eje de 2.0; intégrala desde el inicio</a:t>
-            </a:r>
-          </a:p>
-          <a:p>
-            <a:pPr>
-              <a:spcAft>
-                <a:spcPts val="600"/>
-              </a:spcAft>
-            </a:pPr>
-            <a:r>
-              <a:rPr sz="1500">
-                <a:solidFill>
-                  <a:srgbClr val="22282E"/>
-                </a:solidFill>
-              </a:rPr>
-              <a:t>•  Copiar el Core entero sin priorizar — Inmanejable; selecciona subcategorías relevantes al riesgo</a:t>
-            </a:r>
-          </a:p>
-          <a:p>
-            <a:pPr>
-              <a:spcAft>
-                <a:spcPts val="600"/>
-              </a:spcAft>
-            </a:pPr>
-            <a:r>
-              <a:rPr sz="1500">
-                <a:solidFill>
-                  <a:srgbClr val="22282E"/>
-                </a:solidFill>
-              </a:rPr>
-              <a:t>•  Confundir CSF con marco certificable — CSF no certifica; para eso está ISO 27001</a:t>
+              <a:t>•  Vas a construir un perfil CSF 2.0 para "Ferretería del Sur S.A.".</a:t>
+            </a:r>
+          </a:p>
+          <a:p>
+            <a:pPr>
+              <a:spcAft>
+                <a:spcPts val="600"/>
+              </a:spcAft>
+            </a:pPr>
+            <a:r>
+              <a:rPr sz="1500">
+                <a:solidFill>
+                  <a:srgbClr val="22282E"/>
+                </a:solidFill>
+              </a:rPr>
+              <a:t>•  Descarga el CSF 2.0 Reference Tool y exporta las subcategorías de las 6 funciones a una hoja de cálculo.</a:t>
+            </a:r>
+          </a:p>
+          <a:p>
+            <a:pPr>
+              <a:spcAft>
+                <a:spcPts val="600"/>
+              </a:spcAft>
+            </a:pPr>
+            <a:r>
+              <a:rPr sz="1500">
+                <a:solidFill>
+                  <a:srgbClr val="22282E"/>
+                </a:solidFill>
+              </a:rPr>
+              <a:t>•  Selecciona un subconjunto representativo: 3 subcategorías por función (18 en total), por ejemplo GV.RR-01 (roles), ID.AM-01 (inventario de activos), PR.AA-01 (identidades), DE.CM-01 (monitorización…</a:t>
+            </a:r>
+          </a:p>
+          <a:p>
+            <a:pPr>
+              <a:spcAft>
+                <a:spcPts val="600"/>
+              </a:spcAft>
+            </a:pPr>
+            <a:r>
+              <a:rPr sz="1500">
+                <a:solidFill>
+                  <a:srgbClr val="22282E"/>
+                </a:solidFill>
+              </a:rPr>
+              <a:t>•  Perfil actual: puntúa cada subcategoría de 0 (no implementado) a 4 (optimizado) según la situación de la empresa. Sé honesto: muchas estarán en 1–2.</a:t>
+            </a:r>
+          </a:p>
+          <a:p>
+            <a:pPr>
+              <a:spcAft>
+                <a:spcPts val="600"/>
+              </a:spcAft>
+            </a:pPr>
+            <a:r>
+              <a:rPr sz="1500">
+                <a:solidFill>
+                  <a:srgbClr val="22282E"/>
+                </a:solidFill>
+              </a:rPr>
+              <a:t>•  Perfil objetivo: define el nivel deseado en 12 meses para cada una.</a:t>
+            </a:r>
+          </a:p>
+          <a:p>
+            <a:pPr>
+              <a:spcAft>
+                <a:spcPts val="600"/>
+              </a:spcAft>
+            </a:pPr>
+            <a:r>
+              <a:rPr sz="1500">
+                <a:solidFill>
+                  <a:srgbClr val="22282E"/>
+                </a:solidFill>
+              </a:rPr>
+              <a:t>•  Gap analysis: calcula la diferencia (objetivo − actual) y ordena por mayor brecha.</a:t>
+            </a:r>
+          </a:p>
+          <a:p>
+            <a:pPr>
+              <a:spcAft>
+                <a:spcPts val="600"/>
+              </a:spcAft>
+            </a:pPr>
+            <a:r>
+              <a:rPr sz="1500">
+                <a:solidFill>
+                  <a:srgbClr val="22282E"/>
+                </a:solidFill>
+              </a:rPr>
+              <a:t>•  Tier global: valora si la organización está en Tier 1 (Parcial) o Tier 2 (Informado por riesgo) y justifica.</a:t>
             </a:r>
           </a:p>
         </p:txBody>
@@ -3347,7 +3381,7 @@
                   <a:srgbClr val="0B3D2E"/>
                 </a:solidFill>
               </a:rPr>
-              <a:t>❓ Preguntas frecuentes</a:t>
+              <a:t>✍️ Ejercicios</a:t>
             </a:r>
           </a:p>
         </p:txBody>
@@ -3385,97 +3419,82 @@
                   <a:srgbClr val="22282E"/>
                 </a:solidFill>
               </a:rPr>
-              <a:t>•  ❓ ¿CSF sustituye a ISO 27001?</a:t>
-            </a:r>
-          </a:p>
-          <a:p>
-            <a:pPr>
-              <a:spcAft>
-                <a:spcPts val="600"/>
-              </a:spcAft>
-            </a:pPr>
-            <a:r>
-              <a:rPr sz="1500">
-                <a:solidFill>
-                  <a:srgbClr val="22282E"/>
-                </a:solidFill>
-              </a:rPr>
-              <a:t>•  No, se complementan. CSF es un lenguaje flexible para comunicar y planificar; ISO 27001 certifica un sistema de gestión. Muchas organizaciones usan ambos.</a:t>
-            </a:r>
-          </a:p>
-          <a:p>
-            <a:pPr>
-              <a:spcAft>
-                <a:spcPts val="600"/>
-              </a:spcAft>
-            </a:pPr>
-            <a:r>
-              <a:rPr sz="1500">
-                <a:solidFill>
-                  <a:srgbClr val="22282E"/>
-                </a:solidFill>
-              </a:rPr>
-              <a:t>•  ❓ ¿Qué cambió en la versión 2.0 (2024)?</a:t>
-            </a:r>
-          </a:p>
-          <a:p>
-            <a:pPr>
-              <a:spcAft>
-                <a:spcPts val="600"/>
-              </a:spcAft>
-            </a:pPr>
-            <a:r>
-              <a:rPr sz="1500">
-                <a:solidFill>
-                  <a:srgbClr val="22282E"/>
-                </a:solidFill>
-              </a:rPr>
-              <a:t>•  Se añadió la función GOVERN, se amplió el alcance a todas las organizaciones (no solo infraestructura crítica) y se reforzaron cadena de suministro y métricas.</a:t>
-            </a:r>
-          </a:p>
-          <a:p>
-            <a:pPr>
-              <a:spcAft>
-                <a:spcPts val="600"/>
-              </a:spcAft>
-            </a:pPr>
-            <a:r>
-              <a:rPr sz="1500">
-                <a:solidFill>
-                  <a:srgbClr val="22282E"/>
-                </a:solidFill>
-              </a:rPr>
-              <a:t>•  ❓ ¿Es obligatorio en EE. UU.?</a:t>
-            </a:r>
-          </a:p>
-          <a:p>
-            <a:pPr>
-              <a:spcAft>
-                <a:spcPts val="600"/>
-              </a:spcAft>
-            </a:pPr>
-            <a:r>
-              <a:rPr sz="1500">
-                <a:solidFill>
-                  <a:srgbClr val="22282E"/>
-                </a:solidFill>
-              </a:rPr>
-              <a:t>•  Es voluntario en general, aunque muchas agencias y contratos federales lo exigen de facto.</a:t>
-            </a:r>
-          </a:p>
-          <a:p>
-            <a:pPr>
-              <a:spcAft>
-                <a:spcPts val="600"/>
-              </a:spcAft>
-            </a:pPr>
-            <a:r>
-              <a:rPr sz="1500">
-                <a:solidFill>
-                  <a:srgbClr val="22282E"/>
-                </a:solidFill>
-              </a:rPr>
-              <a:t>•  ❓ ¿Sirve para una PYME?</a:t>
+              <a:t>•  Explica qué aporta la función GOVERN que no existía en CSF 1.1.</a:t>
+            </a:r>
+          </a:p>
+          <a:p>
+            <a:pPr>
+              <a:spcAft>
+                <a:spcPts val="600"/>
+              </a:spcAft>
+            </a:pPr>
+            <a:r>
+              <a:rPr sz="1500">
+                <a:solidFill>
+                  <a:srgbClr val="22282E"/>
+                </a:solidFill>
+              </a:rPr>
+              <a:t>•  Clasifica estas actividades por función: inventariar activos, desplegar EDR, restaurar backups, revisar logs de SIEM.</a:t>
+            </a:r>
+          </a:p>
+          <a:p>
+            <a:pPr>
+              <a:spcAft>
+                <a:spcPts val="600"/>
+              </a:spcAft>
+            </a:pPr>
+            <a:r>
+              <a:rPr sz="1500">
+                <a:solidFill>
+                  <a:srgbClr val="22282E"/>
+                </a:solidFill>
+              </a:rPr>
+              <a:t>•  Define en tus palabras cada uno de los 4 Tiers con un ejemplo.</a:t>
+            </a:r>
+          </a:p>
+          <a:p>
+            <a:pPr>
+              <a:spcAft>
+                <a:spcPts val="600"/>
+              </a:spcAft>
+            </a:pPr>
+            <a:r>
+              <a:rPr sz="1500">
+                <a:solidFill>
+                  <a:srgbClr val="22282E"/>
+                </a:solidFill>
+              </a:rPr>
+              <a:t>•  Convierte un gap analysis en tres objetivos SMART.</a:t>
+            </a:r>
+          </a:p>
+          <a:p>
+            <a:pPr>
+              <a:spcAft>
+                <a:spcPts val="600"/>
+              </a:spcAft>
+            </a:pPr>
+            <a:r>
+              <a:rPr sz="1500">
+                <a:solidFill>
+                  <a:srgbClr val="22282E"/>
+                </a:solidFill>
+              </a:rPr>
+              <a:t>•  ¿Puede una organización estar en Tier 4 en DETECT y Tier 1 en RECOVER? Justifica.</a:t>
+            </a:r>
+          </a:p>
+          <a:p>
+            <a:pPr>
+              <a:spcAft>
+                <a:spcPts val="600"/>
+              </a:spcAft>
+            </a:pPr>
+            <a:r>
+              <a:rPr sz="1500">
+                <a:solidFill>
+                  <a:srgbClr val="22282E"/>
+                </a:solidFill>
+              </a:rPr>
+              <a:t>•  Compara CSF y ISO 27001: ¿cuál certifica y cuál comunica?</a:t>
             </a:r>
           </a:p>
         </p:txBody>
@@ -3526,7 +3545,7 @@
                   <a:srgbClr val="0B3D2E"/>
                 </a:solidFill>
               </a:rPr>
-              <a:t>🔗 Referencias</a:t>
+              <a:t>📝 Reto verificable</a:t>
             </a:r>
           </a:p>
         </p:txBody>
@@ -3564,6 +3583,438 @@
                   <a:srgbClr val="22282E"/>
                 </a:solidFill>
               </a:rPr>
+              <a:t>•  Entrega un perfil CSF 2.0 con al menos 18 subcategorías (3 por función), con puntuación actual y objetivo, gap analysis ordenado y una hoja de ruta de 5 acciones priorizadas con responsable y plazo.</a:t>
+            </a:r>
+          </a:p>
+          <a:p>
+            <a:pPr>
+              <a:spcAft>
+                <a:spcPts val="600"/>
+              </a:spcAft>
+            </a:pPr>
+            <a:r>
+              <a:rPr sz="1500">
+                <a:solidFill>
+                  <a:srgbClr val="22282E"/>
+                </a:solidFill>
+              </a:rPr>
+              <a:t>•  Criterio de aceptación: las 6 funciones están representadas, cada acción de la hoja de ruta se justifica por una brecha concreta, y al menos 3 subcategorías están mapeadas a su control ISO/CIS…</a:t>
+            </a:r>
+          </a:p>
+        </p:txBody>
+      </p:sp>
+    </p:spTree>
+  </p:cSld>
+  <p:clrMapOvr>
+    <a:masterClrMapping/>
+  </p:clrMapOvr>
+</p:sld>
+</file>
+
+<file path=ppt/slides/slide13.xml><?xml version="1.0" encoding="utf-8"?>
+<p:sld xmlns:a="http://schemas.openxmlformats.org/drawingml/2006/main" xmlns:p="http://schemas.openxmlformats.org/presentationml/2006/main" xmlns:r="http://schemas.openxmlformats.org/officeDocument/2006/relationships">
+  <p:cSld>
+    <p:spTree>
+      <p:nvGrpSpPr>
+        <p:cNvPr id="1" name=""/>
+        <p:cNvGrpSpPr/>
+        <p:nvPr/>
+      </p:nvGrpSpPr>
+      <p:grpSpPr/>
+      <p:sp>
+        <p:nvSpPr>
+          <p:cNvPr id="2" name="TextBox 1"/>
+          <p:cNvSpPr txBox="1"/>
+          <p:nvPr/>
+        </p:nvSpPr>
+        <p:spPr>
+          <a:xfrm>
+            <a:off x="457200" y="320040"/>
+            <a:ext cx="8229600" cy="822960"/>
+          </a:xfrm>
+          <a:prstGeom prst="rect">
+            <a:avLst/>
+          </a:prstGeom>
+          <a:noFill/>
+        </p:spPr>
+        <p:txBody>
+          <a:bodyPr wrap="square">
+            <a:spAutoFit/>
+          </a:bodyPr>
+          <a:lstStyle/>
+          <a:p>
+            <a:r>
+              <a:rPr sz="2600" b="1">
+                <a:solidFill>
+                  <a:srgbClr val="0B3D2E"/>
+                </a:solidFill>
+              </a:rPr>
+              <a:t>⚠️ Errores comunes</a:t>
+            </a:r>
+          </a:p>
+        </p:txBody>
+      </p:sp>
+      <p:sp>
+        <p:nvSpPr>
+          <p:cNvPr id="3" name="TextBox 2"/>
+          <p:cNvSpPr txBox="1"/>
+          <p:nvPr/>
+        </p:nvSpPr>
+        <p:spPr>
+          <a:xfrm>
+            <a:off x="457200" y="1280160"/>
+            <a:ext cx="8229600" cy="4937760"/>
+          </a:xfrm>
+          <a:prstGeom prst="rect">
+            <a:avLst/>
+          </a:prstGeom>
+          <a:noFill/>
+        </p:spPr>
+        <p:txBody>
+          <a:bodyPr wrap="square">
+            <a:spAutoFit/>
+          </a:bodyPr>
+          <a:lstStyle/>
+          <a:p>
+            <a:pPr>
+              <a:spcAft>
+                <a:spcPts val="600"/>
+              </a:spcAft>
+            </a:pPr>
+            <a:r>
+              <a:rPr sz="1500">
+                <a:solidFill>
+                  <a:srgbClr val="22282E"/>
+                </a:solidFill>
+              </a:rPr>
+              <a:t>•  Tratar el Tier como una "nota" a maximizar — El Tier objetivo depende del apetito de riesgo, no siempre es 4</a:t>
+            </a:r>
+          </a:p>
+          <a:p>
+            <a:pPr>
+              <a:spcAft>
+                <a:spcPts val="600"/>
+              </a:spcAft>
+            </a:pPr>
+            <a:r>
+              <a:rPr sz="1500">
+                <a:solidFill>
+                  <a:srgbClr val="22282E"/>
+                </a:solidFill>
+              </a:rPr>
+              <a:t>•  Perfil actual inflado — Sesgo de deseabilidad; puntúa con evidencia real</a:t>
+            </a:r>
+          </a:p>
+          <a:p>
+            <a:pPr>
+              <a:spcAft>
+                <a:spcPts val="600"/>
+              </a:spcAft>
+            </a:pPr>
+            <a:r>
+              <a:rPr sz="1500">
+                <a:solidFill>
+                  <a:srgbClr val="22282E"/>
+                </a:solidFill>
+              </a:rPr>
+              <a:t>•  Ignorar la función GOVERN — Es el eje de 2.0; intégrala desde el inicio</a:t>
+            </a:r>
+          </a:p>
+          <a:p>
+            <a:pPr>
+              <a:spcAft>
+                <a:spcPts val="600"/>
+              </a:spcAft>
+            </a:pPr>
+            <a:r>
+              <a:rPr sz="1500">
+                <a:solidFill>
+                  <a:srgbClr val="22282E"/>
+                </a:solidFill>
+              </a:rPr>
+              <a:t>•  Copiar el Core entero sin priorizar — Inmanejable; selecciona subcategorías relevantes al riesgo</a:t>
+            </a:r>
+          </a:p>
+          <a:p>
+            <a:pPr>
+              <a:spcAft>
+                <a:spcPts val="600"/>
+              </a:spcAft>
+            </a:pPr>
+            <a:r>
+              <a:rPr sz="1500">
+                <a:solidFill>
+                  <a:srgbClr val="22282E"/>
+                </a:solidFill>
+              </a:rPr>
+              <a:t>•  Confundir CSF con marco certificable — CSF no certifica; para eso está ISO 27001</a:t>
+            </a:r>
+          </a:p>
+        </p:txBody>
+      </p:sp>
+    </p:spTree>
+  </p:cSld>
+  <p:clrMapOvr>
+    <a:masterClrMapping/>
+  </p:clrMapOvr>
+</p:sld>
+</file>
+
+<file path=ppt/slides/slide14.xml><?xml version="1.0" encoding="utf-8"?>
+<p:sld xmlns:a="http://schemas.openxmlformats.org/drawingml/2006/main" xmlns:p="http://schemas.openxmlformats.org/presentationml/2006/main" xmlns:r="http://schemas.openxmlformats.org/officeDocument/2006/relationships">
+  <p:cSld>
+    <p:spTree>
+      <p:nvGrpSpPr>
+        <p:cNvPr id="1" name=""/>
+        <p:cNvGrpSpPr/>
+        <p:nvPr/>
+      </p:nvGrpSpPr>
+      <p:grpSpPr/>
+      <p:sp>
+        <p:nvSpPr>
+          <p:cNvPr id="2" name="TextBox 1"/>
+          <p:cNvSpPr txBox="1"/>
+          <p:nvPr/>
+        </p:nvSpPr>
+        <p:spPr>
+          <a:xfrm>
+            <a:off x="457200" y="320040"/>
+            <a:ext cx="8229600" cy="822960"/>
+          </a:xfrm>
+          <a:prstGeom prst="rect">
+            <a:avLst/>
+          </a:prstGeom>
+          <a:noFill/>
+        </p:spPr>
+        <p:txBody>
+          <a:bodyPr wrap="square">
+            <a:spAutoFit/>
+          </a:bodyPr>
+          <a:lstStyle/>
+          <a:p>
+            <a:r>
+              <a:rPr sz="2600" b="1">
+                <a:solidFill>
+                  <a:srgbClr val="0B3D2E"/>
+                </a:solidFill>
+              </a:rPr>
+              <a:t>❓ Preguntas frecuentes</a:t>
+            </a:r>
+          </a:p>
+        </p:txBody>
+      </p:sp>
+      <p:sp>
+        <p:nvSpPr>
+          <p:cNvPr id="3" name="TextBox 2"/>
+          <p:cNvSpPr txBox="1"/>
+          <p:nvPr/>
+        </p:nvSpPr>
+        <p:spPr>
+          <a:xfrm>
+            <a:off x="457200" y="1280160"/>
+            <a:ext cx="8229600" cy="4937760"/>
+          </a:xfrm>
+          <a:prstGeom prst="rect">
+            <a:avLst/>
+          </a:prstGeom>
+          <a:noFill/>
+        </p:spPr>
+        <p:txBody>
+          <a:bodyPr wrap="square">
+            <a:spAutoFit/>
+          </a:bodyPr>
+          <a:lstStyle/>
+          <a:p>
+            <a:pPr>
+              <a:spcAft>
+                <a:spcPts val="600"/>
+              </a:spcAft>
+            </a:pPr>
+            <a:r>
+              <a:rPr sz="1500">
+                <a:solidFill>
+                  <a:srgbClr val="22282E"/>
+                </a:solidFill>
+              </a:rPr>
+              <a:t>•  ❓ ¿CSF sustituye a ISO 27001?</a:t>
+            </a:r>
+          </a:p>
+          <a:p>
+            <a:pPr>
+              <a:spcAft>
+                <a:spcPts val="600"/>
+              </a:spcAft>
+            </a:pPr>
+            <a:r>
+              <a:rPr sz="1500">
+                <a:solidFill>
+                  <a:srgbClr val="22282E"/>
+                </a:solidFill>
+              </a:rPr>
+              <a:t>•  No, se complementan. CSF es un lenguaje flexible para comunicar y planificar; ISO 27001 certifica un sistema de gestión. Muchas organizaciones usan ambos.</a:t>
+            </a:r>
+          </a:p>
+          <a:p>
+            <a:pPr>
+              <a:spcAft>
+                <a:spcPts val="600"/>
+              </a:spcAft>
+            </a:pPr>
+            <a:r>
+              <a:rPr sz="1500">
+                <a:solidFill>
+                  <a:srgbClr val="22282E"/>
+                </a:solidFill>
+              </a:rPr>
+              <a:t>•  ❓ ¿Qué cambió en la versión 2.0 (2024)?</a:t>
+            </a:r>
+          </a:p>
+          <a:p>
+            <a:pPr>
+              <a:spcAft>
+                <a:spcPts val="600"/>
+              </a:spcAft>
+            </a:pPr>
+            <a:r>
+              <a:rPr sz="1500">
+                <a:solidFill>
+                  <a:srgbClr val="22282E"/>
+                </a:solidFill>
+              </a:rPr>
+              <a:t>•  Se añadió la función GOVERN, se amplió el alcance a todas las organizaciones (no solo infraestructura crítica) y se reforzaron cadena de suministro y métricas.</a:t>
+            </a:r>
+          </a:p>
+          <a:p>
+            <a:pPr>
+              <a:spcAft>
+                <a:spcPts val="600"/>
+              </a:spcAft>
+            </a:pPr>
+            <a:r>
+              <a:rPr sz="1500">
+                <a:solidFill>
+                  <a:srgbClr val="22282E"/>
+                </a:solidFill>
+              </a:rPr>
+              <a:t>•  ❓ ¿Es obligatorio en EE. UU.?</a:t>
+            </a:r>
+          </a:p>
+          <a:p>
+            <a:pPr>
+              <a:spcAft>
+                <a:spcPts val="600"/>
+              </a:spcAft>
+            </a:pPr>
+            <a:r>
+              <a:rPr sz="1500">
+                <a:solidFill>
+                  <a:srgbClr val="22282E"/>
+                </a:solidFill>
+              </a:rPr>
+              <a:t>•  Es voluntario en general, aunque muchas agencias y contratos federales lo exigen de facto.</a:t>
+            </a:r>
+          </a:p>
+          <a:p>
+            <a:pPr>
+              <a:spcAft>
+                <a:spcPts val="600"/>
+              </a:spcAft>
+            </a:pPr>
+            <a:r>
+              <a:rPr sz="1500">
+                <a:solidFill>
+                  <a:srgbClr val="22282E"/>
+                </a:solidFill>
+              </a:rPr>
+              <a:t>•  ❓ ¿Sirve para una PYME?</a:t>
+            </a:r>
+          </a:p>
+        </p:txBody>
+      </p:sp>
+    </p:spTree>
+  </p:cSld>
+  <p:clrMapOvr>
+    <a:masterClrMapping/>
+  </p:clrMapOvr>
+</p:sld>
+</file>
+
+<file path=ppt/slides/slide15.xml><?xml version="1.0" encoding="utf-8"?>
+<p:sld xmlns:a="http://schemas.openxmlformats.org/drawingml/2006/main" xmlns:p="http://schemas.openxmlformats.org/presentationml/2006/main" xmlns:r="http://schemas.openxmlformats.org/officeDocument/2006/relationships">
+  <p:cSld>
+    <p:spTree>
+      <p:nvGrpSpPr>
+        <p:cNvPr id="1" name=""/>
+        <p:cNvGrpSpPr/>
+        <p:nvPr/>
+      </p:nvGrpSpPr>
+      <p:grpSpPr/>
+      <p:sp>
+        <p:nvSpPr>
+          <p:cNvPr id="2" name="TextBox 1"/>
+          <p:cNvSpPr txBox="1"/>
+          <p:nvPr/>
+        </p:nvSpPr>
+        <p:spPr>
+          <a:xfrm>
+            <a:off x="457200" y="320040"/>
+            <a:ext cx="8229600" cy="822960"/>
+          </a:xfrm>
+          <a:prstGeom prst="rect">
+            <a:avLst/>
+          </a:prstGeom>
+          <a:noFill/>
+        </p:spPr>
+        <p:txBody>
+          <a:bodyPr wrap="square">
+            <a:spAutoFit/>
+          </a:bodyPr>
+          <a:lstStyle/>
+          <a:p>
+            <a:r>
+              <a:rPr sz="2600" b="1">
+                <a:solidFill>
+                  <a:srgbClr val="0B3D2E"/>
+                </a:solidFill>
+              </a:rPr>
+              <a:t>🔗 Referencias</a:t>
+            </a:r>
+          </a:p>
+        </p:txBody>
+      </p:sp>
+      <p:sp>
+        <p:nvSpPr>
+          <p:cNvPr id="3" name="TextBox 2"/>
+          <p:cNvSpPr txBox="1"/>
+          <p:nvPr/>
+        </p:nvSpPr>
+        <p:spPr>
+          <a:xfrm>
+            <a:off x="457200" y="1280160"/>
+            <a:ext cx="8229600" cy="4937760"/>
+          </a:xfrm>
+          <a:prstGeom prst="rect">
+            <a:avLst/>
+          </a:prstGeom>
+          <a:noFill/>
+        </p:spPr>
+        <p:txBody>
+          <a:bodyPr wrap="square">
+            <a:spAutoFit/>
+          </a:bodyPr>
+          <a:lstStyle/>
+          <a:p>
+            <a:pPr>
+              <a:spcAft>
+                <a:spcPts val="600"/>
+              </a:spcAft>
+            </a:pPr>
+            <a:r>
+              <a:rPr sz="1500">
+                <a:solidFill>
+                  <a:srgbClr val="22282E"/>
+                </a:solidFill>
+              </a:rPr>
               <a:t>•  NIST Cybersecurity Framework 2.0. &lt;https://www.nist.gov/cyberframework&gt;</a:t>
             </a:r>
           </a:p>
@@ -3629,6 +4080,81 @@
           </a:p>
         </p:txBody>
       </p:sp>
+    </p:spTree>
+  </p:cSld>
+  <p:clrMapOvr>
+    <a:masterClrMapping/>
+  </p:clrMapOvr>
+</p:sld>
+</file>
+
+<file path=ppt/slides/slide16.xml><?xml version="1.0" encoding="utf-8"?>
+<p:sld xmlns:a="http://schemas.openxmlformats.org/drawingml/2006/main" xmlns:p="http://schemas.openxmlformats.org/presentationml/2006/main" xmlns:r="http://schemas.openxmlformats.org/officeDocument/2006/relationships">
+  <p:cSld>
+    <p:spTree>
+      <p:nvGrpSpPr>
+        <p:cNvPr id="1" name=""/>
+        <p:cNvGrpSpPr/>
+        <p:nvPr/>
+      </p:nvGrpSpPr>
+      <p:grpSpPr/>
+      <p:sp>
+        <p:nvSpPr>
+          <p:cNvPr id="2" name="TextBox 1"/>
+          <p:cNvSpPr txBox="1"/>
+          <p:nvPr/>
+        </p:nvSpPr>
+        <p:spPr>
+          <a:xfrm>
+            <a:off x="457200" y="274320"/>
+            <a:ext cx="8229600" cy="640080"/>
+          </a:xfrm>
+          <a:prstGeom prst="rect">
+            <a:avLst/>
+          </a:prstGeom>
+          <a:noFill/>
+        </p:spPr>
+        <p:txBody>
+          <a:bodyPr wrap="square">
+            <a:spAutoFit/>
+          </a:bodyPr>
+          <a:lstStyle/>
+          <a:p>
+            <a:r>
+              <a:rPr sz="2200" b="1">
+                <a:solidFill>
+                  <a:srgbClr val="0B3D2E"/>
+                </a:solidFill>
+              </a:rPr>
+              <a:t>Diagrama de la clase</a:t>
+            </a:r>
+          </a:p>
+        </p:txBody>
+      </p:sp>
+      <p:pic>
+        <p:nvPicPr>
+          <p:cNvPr id="3" name="Picture 2" descr="2504312078ff001b.png"/>
+          <p:cNvPicPr>
+            <a:picLocks noChangeAspect="1"/>
+          </p:cNvPicPr>
+          <p:nvPr/>
+        </p:nvPicPr>
+        <p:blipFill>
+          <a:blip r:embed="rId2"/>
+          <a:stretch>
+            <a:fillRect/>
+          </a:stretch>
+        </p:blipFill>
+        <p:spPr>
+          <a:xfrm>
+            <a:off x="457200" y="3003804"/>
+            <a:ext cx="8229600" cy="1490472"/>
+          </a:xfrm>
+          <a:prstGeom prst="rect">
+            <a:avLst/>
+          </a:prstGeom>
+        </p:spPr>
+      </p:pic>
     </p:spTree>
   </p:cSld>
   <p:clrMapOvr>
@@ -3713,7 +4239,7 @@
                   <a:srgbClr val="22282E"/>
                 </a:solidFill>
               </a:rPr>
-              <a:t>•  Dominar el NIST Cybersecurity Framework (CSF) 2.0, el marco voluntario más usado en el mundo para organizar y comunicar la postura de ciberseguridad. Al terminar sabrás usar sus seis funciones, construir un perfil actual y objetivo, evaluar niveles de implementación (Tiers) y usar el CSF como lenguaje común entre lo técnico y la dirección.</a:t>
+              <a:t>•  Dominar el NIST Cybersecurity Framework (CSF) 2.0, el marco voluntario más usado en el mundo para organizar y comunicar la postura de ciberseguridad. Al terminar sabrás usar sus seis funciones…</a:t>
             </a:r>
           </a:p>
         </p:txBody>
@@ -4107,7 +4633,7 @@
                   <a:srgbClr val="0B3D2E"/>
                 </a:solidFill>
               </a:rPr>
-              <a:t>📖 Definiciones y características</a:t>
+              <a:t>🧠 Explicación en profundidad</a:t>
             </a:r>
           </a:p>
         </p:txBody>
@@ -4145,97 +4671,22 @@
                   <a:srgbClr val="22282E"/>
                 </a:solidFill>
               </a:rPr>
-              <a:t>•  CSF Core: jerarquía de Funciones → Categorías → Subcategorías → Referencias informativas. Clave: describe qué lograr, no cómo.</a:t>
-            </a:r>
-          </a:p>
-          <a:p>
-            <a:pPr>
-              <a:spcAft>
-                <a:spcPts val="600"/>
-              </a:spcAft>
-            </a:pPr>
-            <a:r>
-              <a:rPr sz="1500">
-                <a:solidFill>
-                  <a:srgbClr val="22282E"/>
-                </a:solidFill>
-              </a:rPr>
-              <a:t>•  GOVERN (GV): función nueva en 2.0 que abarca estrategia, roles, política y supervisión de riesgo. Clave: sitúa la gobernanza en el centro.</a:t>
-            </a:r>
-          </a:p>
-          <a:p>
-            <a:pPr>
-              <a:spcAft>
-                <a:spcPts val="600"/>
-              </a:spcAft>
-            </a:pPr>
-            <a:r>
-              <a:rPr sz="1500">
-                <a:solidFill>
-                  <a:srgbClr val="22282E"/>
-                </a:solidFill>
-              </a:rPr>
-              <a:t>•  IDENTIFY (ID): conocer activos, riesgos y contexto. Clave: no puedes proteger lo que no conoces.</a:t>
-            </a:r>
-          </a:p>
-          <a:p>
-            <a:pPr>
-              <a:spcAft>
-                <a:spcPts val="600"/>
-              </a:spcAft>
-            </a:pPr>
-            <a:r>
-              <a:rPr sz="1500">
-                <a:solidFill>
-                  <a:srgbClr val="22282E"/>
-                </a:solidFill>
-              </a:rPr>
-              <a:t>•  PROTECT (PR): salvaguardas para limitar el impacto. Clave: controles preventivos.</a:t>
-            </a:r>
-          </a:p>
-          <a:p>
-            <a:pPr>
-              <a:spcAft>
-                <a:spcPts val="600"/>
-              </a:spcAft>
-            </a:pPr>
-            <a:r>
-              <a:rPr sz="1500">
-                <a:solidFill>
-                  <a:srgbClr val="22282E"/>
-                </a:solidFill>
-              </a:rPr>
-              <a:t>•  DETECT (DE): descubrir eventos y anomalías. Clave: visibilidad y monitorización.</a:t>
-            </a:r>
-          </a:p>
-          <a:p>
-            <a:pPr>
-              <a:spcAft>
-                <a:spcPts val="600"/>
-              </a:spcAft>
-            </a:pPr>
-            <a:r>
-              <a:rPr sz="1500">
-                <a:solidFill>
-                  <a:srgbClr val="22282E"/>
-                </a:solidFill>
-              </a:rPr>
-              <a:t>•  RESPOND (RS) / RECOVER (RC): contener y restaurar tras un incidente. Clave: resiliencia operativa.</a:t>
-            </a:r>
-          </a:p>
-          <a:p>
-            <a:pPr>
-              <a:spcAft>
-                <a:spcPts val="600"/>
-              </a:spcAft>
-            </a:pPr>
-            <a:r>
-              <a:rPr sz="1500">
-                <a:solidFill>
-                  <a:srgbClr val="22282E"/>
-                </a:solidFill>
-              </a:rPr>
-              <a:t>•  Tier: nivel de rigor de la gestión de riesgo (1 Parcial → 4 Adaptativo). Clave: es madurez, no una nota de examen.</a:t>
+              <a:t>•  NIST CSF 2.0 organiza resultados en Govern, Identify, Protect, Detect, Respond y Recover. No prescribe productos ni certifica conformidad. El perfil actual describe resultados existentes; el objetivo…</a:t>
+            </a:r>
+          </a:p>
+          <a:p>
+            <a:pPr>
+              <a:spcAft>
+                <a:spcPts val="600"/>
+              </a:spcAft>
+            </a:pPr>
+            <a:r>
+              <a:rPr sz="1500">
+                <a:solidFill>
+                  <a:srgbClr val="22282E"/>
+                </a:solidFill>
+              </a:rPr>
+              <a:t>•  Una organización intenta «implementar NIST» marcando subcategorías. Al vincular cada resultado con servicio, riesgo, dueño y evidencia, descubre que recuperación no fue probada. La brecha genera un…</a:t>
             </a:r>
           </a:p>
         </p:txBody>
@@ -4286,7 +4737,7 @@
                   <a:srgbClr val="0B3D2E"/>
                 </a:solidFill>
               </a:rPr>
-              <a:t>🧰 Herramientas y preparación</a:t>
+              <a:t>📔 Glosario operativo</a:t>
             </a:r>
           </a:p>
         </p:txBody>
@@ -4324,52 +4775,52 @@
                   <a:srgbClr val="22282E"/>
                 </a:solidFill>
               </a:rPr>
-              <a:t>•  El documento oficial NIST CSF 2.0 (descarga gratuita en nist.gov/cyberframework).</a:t>
-            </a:r>
-          </a:p>
-          <a:p>
-            <a:pPr>
-              <a:spcAft>
-                <a:spcPts val="600"/>
-              </a:spcAft>
-            </a:pPr>
-            <a:r>
-              <a:rPr sz="1500">
-                <a:solidFill>
-                  <a:srgbClr val="22282E"/>
-                </a:solidFill>
-              </a:rPr>
-              <a:t>•  El CSF 2.0 Reference Tool de NIST para explorar el Core y exportar a Excel/JSON.</a:t>
-            </a:r>
-          </a:p>
-          <a:p>
-            <a:pPr>
-              <a:spcAft>
-                <a:spcPts val="600"/>
-              </a:spcAft>
-            </a:pPr>
-            <a:r>
-              <a:rPr sz="1500">
-                <a:solidFill>
-                  <a:srgbClr val="22282E"/>
-                </a:solidFill>
-              </a:rPr>
-              <a:t>•  Hoja de cálculo para el perfil y el gap analysis.</a:t>
-            </a:r>
-          </a:p>
-          <a:p>
-            <a:pPr>
-              <a:spcAft>
-                <a:spcPts val="600"/>
-              </a:spcAft>
-            </a:pPr>
-            <a:r>
-              <a:rPr sz="1500">
-                <a:solidFill>
-                  <a:srgbClr val="22282E"/>
-                </a:solidFill>
-              </a:rPr>
-              <a:t>•  Opcional: los Quick Start Guides de NIST por tipo de organización (pyme, gestión de riesgo empresarial).</a:t>
+              <a:t>•  Término — Definición</a:t>
+            </a:r>
+          </a:p>
+          <a:p>
+            <a:pPr>
+              <a:spcAft>
+                <a:spcPts val="600"/>
+              </a:spcAft>
+            </a:pPr>
+            <a:r>
+              <a:rPr sz="1500">
+                <a:solidFill>
+                  <a:srgbClr val="22282E"/>
+                </a:solidFill>
+              </a:rPr>
+              <a:t>•  Core — Taxonomía de resultados del CSF.</a:t>
+            </a:r>
+          </a:p>
+          <a:p>
+            <a:pPr>
+              <a:spcAft>
+                <a:spcPts val="600"/>
+              </a:spcAft>
+            </a:pPr>
+            <a:r>
+              <a:rPr sz="1500">
+                <a:solidFill>
+                  <a:srgbClr val="22282E"/>
+                </a:solidFill>
+              </a:rPr>
+              <a:t>•  Perfil — Selección y priorización contextual de resultados.</a:t>
+            </a:r>
+          </a:p>
+          <a:p>
+            <a:pPr>
+              <a:spcAft>
+                <a:spcPts val="600"/>
+              </a:spcAft>
+            </a:pPr>
+            <a:r>
+              <a:rPr sz="1500">
+                <a:solidFill>
+                  <a:srgbClr val="22282E"/>
+                </a:solidFill>
+              </a:rPr>
+              <a:t>•  Tier — Caracterización del rigor de gestión de riesgo.</a:t>
             </a:r>
           </a:p>
         </p:txBody>
@@ -4420,7 +4871,7 @@
                   <a:srgbClr val="0B3D2E"/>
                 </a:solidFill>
               </a:rPr>
-              <a:t>🧪 Laboratorio guiado (ejercicio aplicado)</a:t>
+              <a:t>✅ Criterio de dominio</a:t>
             </a:r>
           </a:p>
         </p:txBody>
@@ -4458,97 +4909,7 @@
                   <a:srgbClr val="22282E"/>
                 </a:solidFill>
               </a:rPr>
-              <a:t>•  Vas a construir un perfil CSF 2.0 para "Ferretería del Sur S.A.".</a:t>
-            </a:r>
-          </a:p>
-          <a:p>
-            <a:pPr>
-              <a:spcAft>
-                <a:spcPts val="600"/>
-              </a:spcAft>
-            </a:pPr>
-            <a:r>
-              <a:rPr sz="1500">
-                <a:solidFill>
-                  <a:srgbClr val="22282E"/>
-                </a:solidFill>
-              </a:rPr>
-              <a:t>•  Descarga el CSF 2.0 Reference Tool y exporta las subcategorías de las 6 funciones a una hoja de cálculo.</a:t>
-            </a:r>
-          </a:p>
-          <a:p>
-            <a:pPr>
-              <a:spcAft>
-                <a:spcPts val="600"/>
-              </a:spcAft>
-            </a:pPr>
-            <a:r>
-              <a:rPr sz="1500">
-                <a:solidFill>
-                  <a:srgbClr val="22282E"/>
-                </a:solidFill>
-              </a:rPr>
-              <a:t>•  Selecciona un subconjunto representativo: 3 subcategorías por función (18 en total), por ejemplo GV.RR-01 (roles), ID.AM-01 (inventario de activos), PR.AA-01 (identidades), DE.CM-01 (monitorización de red), RS.MA-01 (gestión de incidentes), RC.RP-01 (plan de recuperación).</a:t>
-            </a:r>
-          </a:p>
-          <a:p>
-            <a:pPr>
-              <a:spcAft>
-                <a:spcPts val="600"/>
-              </a:spcAft>
-            </a:pPr>
-            <a:r>
-              <a:rPr sz="1500">
-                <a:solidFill>
-                  <a:srgbClr val="22282E"/>
-                </a:solidFill>
-              </a:rPr>
-              <a:t>•  Perfil actual: puntúa cada subcategoría de 0 (no implementado) a 4 (optimizado) según la situación de la empresa. Sé honesto: muchas estarán en 1–2.</a:t>
-            </a:r>
-          </a:p>
-          <a:p>
-            <a:pPr>
-              <a:spcAft>
-                <a:spcPts val="600"/>
-              </a:spcAft>
-            </a:pPr>
-            <a:r>
-              <a:rPr sz="1500">
-                <a:solidFill>
-                  <a:srgbClr val="22282E"/>
-                </a:solidFill>
-              </a:rPr>
-              <a:t>•  Perfil objetivo: define el nivel deseado en 12 meses para cada una.</a:t>
-            </a:r>
-          </a:p>
-          <a:p>
-            <a:pPr>
-              <a:spcAft>
-                <a:spcPts val="600"/>
-              </a:spcAft>
-            </a:pPr>
-            <a:r>
-              <a:rPr sz="1500">
-                <a:solidFill>
-                  <a:srgbClr val="22282E"/>
-                </a:solidFill>
-              </a:rPr>
-              <a:t>•  Gap analysis: calcula la diferencia (objetivo − actual) y ordena por mayor brecha.</a:t>
-            </a:r>
-          </a:p>
-          <a:p>
-            <a:pPr>
-              <a:spcAft>
-                <a:spcPts val="600"/>
-              </a:spcAft>
-            </a:pPr>
-            <a:r>
-              <a:rPr sz="1500">
-                <a:solidFill>
-                  <a:srgbClr val="22282E"/>
-                </a:solidFill>
-              </a:rPr>
-              <a:t>•  Tier global: valora si la organización está en Tier 1 (Parcial) o Tier 2 (Informado por riesgo) y justifica.</a:t>
+              <a:t>•  Existe dominio cuando el alumno crea perfiles actual y objetivo trazables y evita presentar CSF como auditoría o catálogo de productos.</a:t>
             </a:r>
           </a:p>
         </p:txBody>
@@ -4599,7 +4960,7 @@
                   <a:srgbClr val="0B3D2E"/>
                 </a:solidFill>
               </a:rPr>
-              <a:t>✍️ Ejercicios</a:t>
+              <a:t>📖 Definiciones y características</a:t>
             </a:r>
           </a:p>
         </p:txBody>
@@ -4637,82 +4998,97 @@
                   <a:srgbClr val="22282E"/>
                 </a:solidFill>
               </a:rPr>
-              <a:t>•  Explica qué aporta la función GOVERN que no existía en CSF 1.1.</a:t>
-            </a:r>
-          </a:p>
-          <a:p>
-            <a:pPr>
-              <a:spcAft>
-                <a:spcPts val="600"/>
-              </a:spcAft>
-            </a:pPr>
-            <a:r>
-              <a:rPr sz="1500">
-                <a:solidFill>
-                  <a:srgbClr val="22282E"/>
-                </a:solidFill>
-              </a:rPr>
-              <a:t>•  Clasifica estas actividades por función: inventariar activos, desplegar EDR, restaurar backups, revisar logs de SIEM.</a:t>
-            </a:r>
-          </a:p>
-          <a:p>
-            <a:pPr>
-              <a:spcAft>
-                <a:spcPts val="600"/>
-              </a:spcAft>
-            </a:pPr>
-            <a:r>
-              <a:rPr sz="1500">
-                <a:solidFill>
-                  <a:srgbClr val="22282E"/>
-                </a:solidFill>
-              </a:rPr>
-              <a:t>•  Define en tus palabras cada uno de los 4 Tiers con un ejemplo.</a:t>
-            </a:r>
-          </a:p>
-          <a:p>
-            <a:pPr>
-              <a:spcAft>
-                <a:spcPts val="600"/>
-              </a:spcAft>
-            </a:pPr>
-            <a:r>
-              <a:rPr sz="1500">
-                <a:solidFill>
-                  <a:srgbClr val="22282E"/>
-                </a:solidFill>
-              </a:rPr>
-              <a:t>•  Convierte un gap analysis en tres objetivos SMART.</a:t>
-            </a:r>
-          </a:p>
-          <a:p>
-            <a:pPr>
-              <a:spcAft>
-                <a:spcPts val="600"/>
-              </a:spcAft>
-            </a:pPr>
-            <a:r>
-              <a:rPr sz="1500">
-                <a:solidFill>
-                  <a:srgbClr val="22282E"/>
-                </a:solidFill>
-              </a:rPr>
-              <a:t>•  ¿Puede una organización estar en Tier 4 en DETECT y Tier 1 en RECOVER? Justifica.</a:t>
-            </a:r>
-          </a:p>
-          <a:p>
-            <a:pPr>
-              <a:spcAft>
-                <a:spcPts val="600"/>
-              </a:spcAft>
-            </a:pPr>
-            <a:r>
-              <a:rPr sz="1500">
-                <a:solidFill>
-                  <a:srgbClr val="22282E"/>
-                </a:solidFill>
-              </a:rPr>
-              <a:t>•  Compara CSF y ISO 27001: ¿cuál certifica y cuál comunica?</a:t>
+              <a:t>•  CSF Core: jerarquía de Funciones → Categorías → Subcategorías → Referencias informativas. Clave: describe qué lograr, no cómo.</a:t>
+            </a:r>
+          </a:p>
+          <a:p>
+            <a:pPr>
+              <a:spcAft>
+                <a:spcPts val="600"/>
+              </a:spcAft>
+            </a:pPr>
+            <a:r>
+              <a:rPr sz="1500">
+                <a:solidFill>
+                  <a:srgbClr val="22282E"/>
+                </a:solidFill>
+              </a:rPr>
+              <a:t>•  GOVERN (GV): función nueva en 2.0 que abarca estrategia, roles, política y supervisión de riesgo. Clave: sitúa la gobernanza en el centro.</a:t>
+            </a:r>
+          </a:p>
+          <a:p>
+            <a:pPr>
+              <a:spcAft>
+                <a:spcPts val="600"/>
+              </a:spcAft>
+            </a:pPr>
+            <a:r>
+              <a:rPr sz="1500">
+                <a:solidFill>
+                  <a:srgbClr val="22282E"/>
+                </a:solidFill>
+              </a:rPr>
+              <a:t>•  IDENTIFY (ID): conocer activos, riesgos y contexto. Clave: no puedes proteger lo que no conoces.</a:t>
+            </a:r>
+          </a:p>
+          <a:p>
+            <a:pPr>
+              <a:spcAft>
+                <a:spcPts val="600"/>
+              </a:spcAft>
+            </a:pPr>
+            <a:r>
+              <a:rPr sz="1500">
+                <a:solidFill>
+                  <a:srgbClr val="22282E"/>
+                </a:solidFill>
+              </a:rPr>
+              <a:t>•  PROTECT (PR): salvaguardas para limitar el impacto. Clave: controles preventivos.</a:t>
+            </a:r>
+          </a:p>
+          <a:p>
+            <a:pPr>
+              <a:spcAft>
+                <a:spcPts val="600"/>
+              </a:spcAft>
+            </a:pPr>
+            <a:r>
+              <a:rPr sz="1500">
+                <a:solidFill>
+                  <a:srgbClr val="22282E"/>
+                </a:solidFill>
+              </a:rPr>
+              <a:t>•  DETECT (DE): descubrir eventos y anomalías. Clave: visibilidad y monitorización.</a:t>
+            </a:r>
+          </a:p>
+          <a:p>
+            <a:pPr>
+              <a:spcAft>
+                <a:spcPts val="600"/>
+              </a:spcAft>
+            </a:pPr>
+            <a:r>
+              <a:rPr sz="1500">
+                <a:solidFill>
+                  <a:srgbClr val="22282E"/>
+                </a:solidFill>
+              </a:rPr>
+              <a:t>•  RESPOND (RS) / RECOVER (RC): contener y restaurar tras un incidente. Clave: resiliencia operativa.</a:t>
+            </a:r>
+          </a:p>
+          <a:p>
+            <a:pPr>
+              <a:spcAft>
+                <a:spcPts val="600"/>
+              </a:spcAft>
+            </a:pPr>
+            <a:r>
+              <a:rPr sz="1500">
+                <a:solidFill>
+                  <a:srgbClr val="22282E"/>
+                </a:solidFill>
+              </a:rPr>
+              <a:t>•  Tier: nivel de rigor de la gestión de riesgo (1 Parcial → 4 Adaptativo). Clave: es madurez, no una nota de examen.</a:t>
             </a:r>
           </a:p>
         </p:txBody>
@@ -4763,7 +5139,7 @@
                   <a:srgbClr val="0B3D2E"/>
                 </a:solidFill>
               </a:rPr>
-              <a:t>📝 Reto verificable</a:t>
+              <a:t>🧰 Herramientas y preparación</a:t>
             </a:r>
           </a:p>
         </p:txBody>
@@ -4801,22 +5177,52 @@
                   <a:srgbClr val="22282E"/>
                 </a:solidFill>
               </a:rPr>
-              <a:t>•  Entrega un perfil CSF 2.0 con al menos 18 subcategorías (3 por función), con puntuación actual y objetivo, gap analysis ordenado y una hoja de ruta de 5 acciones priorizadas con responsable y plazo.</a:t>
-            </a:r>
-          </a:p>
-          <a:p>
-            <a:pPr>
-              <a:spcAft>
-                <a:spcPts val="600"/>
-              </a:spcAft>
-            </a:pPr>
-            <a:r>
-              <a:rPr sz="1500">
-                <a:solidFill>
-                  <a:srgbClr val="22282E"/>
-                </a:solidFill>
-              </a:rPr>
-              <a:t>•  Criterio de aceptación: las 6 funciones están representadas, cada acción de la hoja de ruta se justifica por una brecha concreta, y al menos 3 subcategorías están mapeadas a su control ISO/CIS equivalente.</a:t>
+              <a:t>•  El documento oficial NIST CSF 2.0 (descarga gratuita en nist.gov/cyberframework).</a:t>
+            </a:r>
+          </a:p>
+          <a:p>
+            <a:pPr>
+              <a:spcAft>
+                <a:spcPts val="600"/>
+              </a:spcAft>
+            </a:pPr>
+            <a:r>
+              <a:rPr sz="1500">
+                <a:solidFill>
+                  <a:srgbClr val="22282E"/>
+                </a:solidFill>
+              </a:rPr>
+              <a:t>•  El CSF 2.0 Reference Tool de NIST para explorar el Core y exportar a Excel/JSON.</a:t>
+            </a:r>
+          </a:p>
+          <a:p>
+            <a:pPr>
+              <a:spcAft>
+                <a:spcPts val="600"/>
+              </a:spcAft>
+            </a:pPr>
+            <a:r>
+              <a:rPr sz="1500">
+                <a:solidFill>
+                  <a:srgbClr val="22282E"/>
+                </a:solidFill>
+              </a:rPr>
+              <a:t>•  Hoja de cálculo para el perfil y el gap analysis.</a:t>
+            </a:r>
+          </a:p>
+          <a:p>
+            <a:pPr>
+              <a:spcAft>
+                <a:spcPts val="600"/>
+              </a:spcAft>
+            </a:pPr>
+            <a:r>
+              <a:rPr sz="1500">
+                <a:solidFill>
+                  <a:srgbClr val="22282E"/>
+                </a:solidFill>
+              </a:rPr>
+              <a:t>•  Opcional: los Quick Start Guides de NIST por tipo de organización (pyme, gestión de riesgo empresarial).</a:t>
             </a:r>
           </a:p>
         </p:txBody>
